--- a/dataset/guides_final/SYS/guide/IT-SYS-003_사내 시스템 장애 신고·이관 가이드.pptx
+++ b/dataset/guides_final/SYS/guide/IT-SYS-003_사내 시스템 장애 신고·이관 가이드.pptx
@@ -3255,7 +3255,7 @@
                 <a:ea typeface="Malgun Gothic"/>
                 <a:cs typeface="Malgun Gothic"/>
               </a:rPr>
-              <a:t>한화시스템 ICT 임직원 IT 안내 · 사내 시스템</a:t>
+              <a:t>가상 ICT 기업 임직원 IT 안내 · 사내 시스템</a:t>
             </a:r>
           </a:p>
         </p:txBody>
@@ -3487,7 +3487,7 @@
                 <a:ea typeface="Malgun Gothic"/>
                 <a:cs typeface="Malgun Gothic"/>
               </a:rPr>
-              <a:t>© HANWHA SYSTEMS ICT · IT-SYS-003 · 사내 일반</a:t>
+              <a:t>© 가상 ICT 기업 · IT-SYS-003 · 사내 일반</a:t>
             </a:r>
           </a:p>
         </p:txBody>
@@ -5162,7 +5162,7 @@
                 <a:ea typeface="Malgun Gothic"/>
                 <a:cs typeface="Malgun Gothic"/>
               </a:rPr>
-              <a:t>© HANWHA SYSTEMS ICT · IT-SYS-003 · 사내 일반</a:t>
+              <a:t>© 가상 ICT 기업 · IT-SYS-003 · 사내 일반</a:t>
             </a:r>
           </a:p>
         </p:txBody>
@@ -6806,7 +6806,7 @@
                 <a:ea typeface="Malgun Gothic"/>
                 <a:cs typeface="Malgun Gothic"/>
               </a:rPr>
-              <a:t>© HANWHA SYSTEMS ICT · IT-SYS-003 · 사내 일반</a:t>
+              <a:t>© 가상 ICT 기업 · IT-SYS-003 · 사내 일반</a:t>
             </a:r>
           </a:p>
         </p:txBody>
@@ -7345,7 +7345,7 @@
                 <a:ea typeface="Malgun Gothic"/>
                 <a:cs typeface="Malgun Gothic"/>
               </a:rPr>
-              <a:t>© HANWHA SYSTEMS ICT · IT-SYS-003 · 사내 일반</a:t>
+              <a:t>© 가상 ICT 기업 · IT-SYS-003 · 사내 일반</a:t>
             </a:r>
           </a:p>
         </p:txBody>
@@ -7955,7 +7955,7 @@
                 <a:ea typeface="Malgun Gothic"/>
                 <a:cs typeface="Malgun Gothic"/>
               </a:rPr>
-              <a:t>© HANWHA SYSTEMS ICT · IT-SYS-003 · 사내 일반</a:t>
+              <a:t>© 가상 ICT 기업 · IT-SYS-003 · 사내 일반</a:t>
             </a:r>
           </a:p>
         </p:txBody>
@@ -8541,7 +8541,7 @@
                 <a:ea typeface="Malgun Gothic"/>
                 <a:cs typeface="Malgun Gothic"/>
               </a:rPr>
-              <a:t>© HANWHA SYSTEMS ICT · IT-SYS-003 · 사내 일반</a:t>
+              <a:t>© 가상 ICT 기업 · IT-SYS-003 · 사내 일반</a:t>
             </a:r>
           </a:p>
         </p:txBody>
@@ -9200,7 +9200,7 @@
                 <a:ea typeface="Malgun Gothic"/>
                 <a:cs typeface="Malgun Gothic"/>
               </a:rPr>
-              <a:t>© HANWHA SYSTEMS ICT · IT-SYS-003 · 사내 일반</a:t>
+              <a:t>© 가상 ICT 기업 · IT-SYS-003 · 사내 일반</a:t>
             </a:r>
           </a:p>
         </p:txBody>
@@ -9811,7 +9811,7 @@
                 <a:ea typeface="Malgun Gothic"/>
                 <a:cs typeface="Malgun Gothic"/>
               </a:rPr>
-              <a:t>© HANWHA SYSTEMS ICT · IT-SYS-003 · 사내 일반</a:t>
+              <a:t>© 가상 ICT 기업 · IT-SYS-003 · 사내 일반</a:t>
             </a:r>
           </a:p>
         </p:txBody>
@@ -11580,7 +11580,7 @@
                 <a:ea typeface="Malgun Gothic"/>
                 <a:cs typeface="Malgun Gothic"/>
               </a:rPr>
-              <a:t>© HANWHA SYSTEMS ICT · IT-SYS-003 · 사내 일반</a:t>
+              <a:t>© 가상 ICT 기업 · IT-SYS-003 · 사내 일반</a:t>
             </a:r>
           </a:p>
         </p:txBody>
@@ -13271,7 +13271,7 @@
                 <a:ea typeface="Malgun Gothic"/>
                 <a:cs typeface="Malgun Gothic"/>
               </a:rPr>
-              <a:t>© HANWHA SYSTEMS ICT · IT-SYS-003 · 사내 일반</a:t>
+              <a:t>© 가상 ICT 기업 · IT-SYS-003 · 사내 일반</a:t>
             </a:r>
           </a:p>
         </p:txBody>
@@ -13810,7 +13810,7 @@
                 <a:ea typeface="Malgun Gothic"/>
                 <a:cs typeface="Malgun Gothic"/>
               </a:rPr>
-              <a:t>© HANWHA SYSTEMS ICT · IT-SYS-003 · 사내 일반</a:t>
+              <a:t>© 가상 ICT 기업 · IT-SYS-003 · 사내 일반</a:t>
             </a:r>
           </a:p>
         </p:txBody>
@@ -15639,7 +15639,7 @@
                 <a:ea typeface="Malgun Gothic"/>
                 <a:cs typeface="Malgun Gothic"/>
               </a:rPr>
-              <a:t>© HANWHA SYSTEMS ICT · IT-SYS-003 · 사내 일반</a:t>
+              <a:t>© 가상 ICT 기업 · IT-SYS-003 · 사내 일반</a:t>
             </a:r>
           </a:p>
         </p:txBody>
@@ -16249,7 +16249,7 @@
                 <a:ea typeface="Malgun Gothic"/>
                 <a:cs typeface="Malgun Gothic"/>
               </a:rPr>
-              <a:t>© HANWHA SYSTEMS ICT · IT-SYS-003 · 사내 일반</a:t>
+              <a:t>© 가상 ICT 기업 · IT-SYS-003 · 사내 일반</a:t>
             </a:r>
           </a:p>
         </p:txBody>
@@ -16954,7 +16954,7 @@
                 <a:ea typeface="Malgun Gothic"/>
                 <a:cs typeface="Malgun Gothic"/>
               </a:rPr>
-              <a:t>© HANWHA SYSTEMS ICT · IT-SYS-003 · 사내 일반</a:t>
+              <a:t>© 가상 ICT 기업 · IT-SYS-003 · 사내 일반</a:t>
             </a:r>
           </a:p>
         </p:txBody>
@@ -17611,7 +17611,7 @@
                 <a:ea typeface="Malgun Gothic"/>
                 <a:cs typeface="Malgun Gothic"/>
               </a:rPr>
-              <a:t>© HANWHA SYSTEMS ICT · IT-SYS-003 · 사내 일반</a:t>
+              <a:t>© 가상 ICT 기업 · IT-SYS-003 · 사내 일반</a:t>
             </a:r>
           </a:p>
         </p:txBody>
@@ -20297,7 +20297,7 @@
                 <a:ea typeface="Malgun Gothic"/>
                 <a:cs typeface="Malgun Gothic"/>
               </a:rPr>
-              <a:t>© HANWHA SYSTEMS ICT · IT-SYS-003 · 사내 일반</a:t>
+              <a:t>© 가상 ICT 기업 · IT-SYS-003 · 사내 일반</a:t>
             </a:r>
           </a:p>
         </p:txBody>
@@ -20860,7 +20860,7 @@
                 <a:ea typeface="Malgun Gothic"/>
                 <a:cs typeface="Malgun Gothic"/>
               </a:rPr>
-              <a:t>© HANWHA SYSTEMS ICT · IT-SYS-003 · 사내 일반</a:t>
+              <a:t>© 가상 ICT 기업 · IT-SYS-003 · 사내 일반</a:t>
             </a:r>
           </a:p>
         </p:txBody>
@@ -21470,7 +21470,7 @@
                 <a:ea typeface="Malgun Gothic"/>
                 <a:cs typeface="Malgun Gothic"/>
               </a:rPr>
-              <a:t>© HANWHA SYSTEMS ICT · IT-SYS-003 · 사내 일반</a:t>
+              <a:t>© 가상 ICT 기업 · IT-SYS-003 · 사내 일반</a:t>
             </a:r>
           </a:p>
         </p:txBody>
@@ -22129,7 +22129,7 @@
                 <a:ea typeface="Malgun Gothic"/>
                 <a:cs typeface="Malgun Gothic"/>
               </a:rPr>
-              <a:t>© HANWHA SYSTEMS ICT · IT-SYS-003 · 사내 일반</a:t>
+              <a:t>© 가상 ICT 기업 · IT-SYS-003 · 사내 일반</a:t>
             </a:r>
           </a:p>
         </p:txBody>
@@ -22716,7 +22716,7 @@
                 <a:ea typeface="Malgun Gothic"/>
                 <a:cs typeface="Malgun Gothic"/>
               </a:rPr>
-              <a:t>© HANWHA SYSTEMS ICT · IT-SYS-003 · 사내 일반</a:t>
+              <a:t>© 가상 ICT 기업 · IT-SYS-003 · 사내 일반</a:t>
             </a:r>
           </a:p>
         </p:txBody>
@@ -23302,7 +23302,7 @@
                 <a:ea typeface="Malgun Gothic"/>
                 <a:cs typeface="Malgun Gothic"/>
               </a:rPr>
-              <a:t>© HANWHA SYSTEMS ICT · IT-SYS-003 · 사내 일반</a:t>
+              <a:t>© 가상 ICT 기업 · IT-SYS-003 · 사내 일반</a:t>
             </a:r>
           </a:p>
         </p:txBody>
@@ -26170,7 +26170,7 @@
                 <a:ea typeface="Malgun Gothic"/>
                 <a:cs typeface="Malgun Gothic"/>
               </a:rPr>
-              <a:t>© HANWHA SYSTEMS ICT · IT-SYS-003 · 사내 일반</a:t>
+              <a:t>© 가상 ICT 기업 · IT-SYS-003 · 사내 일반</a:t>
             </a:r>
           </a:p>
         </p:txBody>
@@ -27446,7 +27446,7 @@
                 <a:ea typeface="Malgun Gothic"/>
                 <a:cs typeface="Malgun Gothic"/>
               </a:rPr>
-              <a:t>© HANWHA SYSTEMS ICT · IT-SYS-003 · 사내 일반</a:t>
+              <a:t>© 가상 ICT 기업 · IT-SYS-003 · 사내 일반</a:t>
             </a:r>
           </a:p>
         </p:txBody>
@@ -28009,7 +28009,7 @@
                 <a:ea typeface="Malgun Gothic"/>
                 <a:cs typeface="Malgun Gothic"/>
               </a:rPr>
-              <a:t>© HANWHA SYSTEMS ICT · IT-SYS-003 · 사내 일반</a:t>
+              <a:t>© 가상 ICT 기업 · IT-SYS-003 · 사내 일반</a:t>
             </a:r>
           </a:p>
         </p:txBody>
@@ -28595,7 +28595,7 @@
                 <a:ea typeface="Malgun Gothic"/>
                 <a:cs typeface="Malgun Gothic"/>
               </a:rPr>
-              <a:t>© HANWHA SYSTEMS ICT · IT-SYS-003 · 사내 일반</a:t>
+              <a:t>© 가상 ICT 기업 · IT-SYS-003 · 사내 일반</a:t>
             </a:r>
           </a:p>
         </p:txBody>
@@ -29230,7 +29230,7 @@
                 <a:ea typeface="Malgun Gothic"/>
                 <a:cs typeface="Malgun Gothic"/>
               </a:rPr>
-              <a:t>© HANWHA SYSTEMS ICT · IT-SYS-003 · 사내 일반</a:t>
+              <a:t>© 가상 ICT 기업 · IT-SYS-003 · 사내 일반</a:t>
             </a:r>
           </a:p>
         </p:txBody>
@@ -29912,7 +29912,7 @@
                 <a:ea typeface="Malgun Gothic"/>
                 <a:cs typeface="Malgun Gothic"/>
               </a:rPr>
-              <a:t>© HANWHA SYSTEMS ICT · IT-SYS-003 · 사내 일반</a:t>
+              <a:t>© 가상 ICT 기업 · IT-SYS-003 · 사내 일반</a:t>
             </a:r>
           </a:p>
         </p:txBody>
@@ -30160,7 +30160,7 @@
                 <a:ea typeface="Malgun Gothic"/>
                 <a:cs typeface="Malgun Gothic"/>
               </a:rPr>
-              <a:t>© HANWHA SYSTEMS ICT · IT-SYS-003 · 사내 일반</a:t>
+              <a:t>© 가상 ICT 기업 · IT-SYS-003 · 사내 일반</a:t>
             </a:r>
           </a:p>
         </p:txBody>
@@ -30717,7 +30717,7 @@
                 <a:ea typeface="Malgun Gothic"/>
                 <a:cs typeface="Malgun Gothic"/>
               </a:rPr>
-              <a:t>© HANWHA SYSTEMS ICT · IT-SYS-003 · 사내 일반</a:t>
+              <a:t>© 가상 ICT 기업 · IT-SYS-003 · 사내 일반</a:t>
             </a:r>
           </a:p>
         </p:txBody>
@@ -30965,7 +30965,7 @@
                 <a:ea typeface="Malgun Gothic"/>
                 <a:cs typeface="Malgun Gothic"/>
               </a:rPr>
-              <a:t>© HANWHA SYSTEMS ICT · IT-SYS-003 · 사내 일반</a:t>
+              <a:t>© 가상 ICT 기업 · IT-SYS-003 · 사내 일반</a:t>
             </a:r>
           </a:p>
         </p:txBody>
@@ -31530,7 +31530,7 @@
                 <a:ea typeface="Malgun Gothic"/>
                 <a:cs typeface="Malgun Gothic"/>
               </a:rPr>
-              <a:t>© HANWHA SYSTEMS ICT · IT-SYS-003 · 사내 일반</a:t>
+              <a:t>© 가상 ICT 기업 · IT-SYS-003 · 사내 일반</a:t>
             </a:r>
           </a:p>
         </p:txBody>
@@ -31778,7 +31778,7 @@
                 <a:ea typeface="Malgun Gothic"/>
                 <a:cs typeface="Malgun Gothic"/>
               </a:rPr>
-              <a:t>© HANWHA SYSTEMS ICT · IT-SYS-003 · 사내 일반</a:t>
+              <a:t>© 가상 ICT 기업 · IT-SYS-003 · 사내 일반</a:t>
             </a:r>
           </a:p>
         </p:txBody>
@@ -32290,7 +32290,7 @@
                           <a:ea typeface="Malgun Gothic"/>
                           <a:cs typeface="Malgun Gothic"/>
                         </a:rPr>
-                        <a:t>사내 IT 포털(hanwha-admin) 상단 [챗봇 문의]</a:t>
+                        <a:t>사내 IT 포털 상단 [챗봇 문의]</a:t>
                       </a:r>
                     </a:p>
                   </a:txBody>
@@ -32982,7 +32982,7 @@
                           <a:ea typeface="Malgun Gothic"/>
                           <a:cs typeface="Malgun Gothic"/>
                         </a:rPr>
-                        <a:t>it-helpdesk@hanwha-ict.example</a:t>
+                        <a:t>it-helpdesk@ict.example</a:t>
                       </a:r>
                     </a:p>
                   </a:txBody>
@@ -33281,7 +33281,7 @@
                 <a:ea typeface="Malgun Gothic"/>
                 <a:cs typeface="Malgun Gothic"/>
               </a:rPr>
-              <a:t>© HANWHA SYSTEMS ICT · IT-SYS-003 · 사내 일반</a:t>
+              <a:t>© 가상 ICT 기업 · IT-SYS-003 · 사내 일반</a:t>
             </a:r>
           </a:p>
         </p:txBody>
@@ -33529,7 +33529,7 @@
                 <a:ea typeface="Malgun Gothic"/>
                 <a:cs typeface="Malgun Gothic"/>
               </a:rPr>
-              <a:t>© HANWHA SYSTEMS ICT · IT-SYS-003 · 사내 일반</a:t>
+              <a:t>© 가상 ICT 기업 · IT-SYS-003 · 사내 일반</a:t>
             </a:r>
           </a:p>
         </p:txBody>
@@ -33777,7 +33777,7 @@
                 <a:ea typeface="Malgun Gothic"/>
                 <a:cs typeface="Malgun Gothic"/>
               </a:rPr>
-              <a:t>© HANWHA SYSTEMS ICT · IT-SYS-003 · 사내 일반</a:t>
+              <a:t>© 가상 ICT 기업 · IT-SYS-003 · 사내 일반</a:t>
             </a:r>
           </a:p>
         </p:txBody>
@@ -36046,7 +36046,7 @@
                 <a:ea typeface="Malgun Gothic"/>
                 <a:cs typeface="Malgun Gothic"/>
               </a:rPr>
-              <a:t>© HANWHA SYSTEMS ICT · IT-SYS-003 · 사내 일반</a:t>
+              <a:t>© 가상 ICT 기업 · IT-SYS-003 · 사내 일반</a:t>
             </a:r>
           </a:p>
         </p:txBody>
@@ -37023,7 +37023,7 @@
                 <a:ea typeface="Malgun Gothic"/>
                 <a:cs typeface="Malgun Gothic"/>
               </a:rPr>
-              <a:t>© HANWHA SYSTEMS ICT · IT-SYS-003 · 사내 일반</a:t>
+              <a:t>© 가상 ICT 기업 · IT-SYS-003 · 사내 일반</a:t>
             </a:r>
           </a:p>
         </p:txBody>
@@ -38151,7 +38151,7 @@
                 <a:ea typeface="Malgun Gothic"/>
                 <a:cs typeface="Malgun Gothic"/>
               </a:rPr>
-              <a:t>© HANWHA SYSTEMS ICT · IT-SYS-003 · 사내 일반</a:t>
+              <a:t>© 가상 ICT 기업 · IT-SYS-003 · 사내 일반</a:t>
             </a:r>
           </a:p>
         </p:txBody>
@@ -38399,7 +38399,7 @@
                 <a:ea typeface="Malgun Gothic"/>
                 <a:cs typeface="Malgun Gothic"/>
               </a:rPr>
-              <a:t>© HANWHA SYSTEMS ICT · IT-SYS-003 · 사내 일반</a:t>
+              <a:t>© 가상 ICT 기업 · IT-SYS-003 · 사내 일반</a:t>
             </a:r>
           </a:p>
         </p:txBody>
@@ -39152,7 +39152,7 @@
                 <a:ea typeface="Malgun Gothic"/>
                 <a:cs typeface="Malgun Gothic"/>
               </a:rPr>
-              <a:t>© HANWHA SYSTEMS ICT · IT-SYS-003 · 사내 일반</a:t>
+              <a:t>© 가상 ICT 기업 · IT-SYS-003 · 사내 일반</a:t>
             </a:r>
           </a:p>
         </p:txBody>
@@ -39400,7 +39400,7 @@
                 <a:ea typeface="Malgun Gothic"/>
                 <a:cs typeface="Malgun Gothic"/>
               </a:rPr>
-              <a:t>© HANWHA SYSTEMS ICT · IT-SYS-003 · 사내 일반</a:t>
+              <a:t>© 가상 ICT 기업 · IT-SYS-003 · 사내 일반</a:t>
             </a:r>
           </a:p>
         </p:txBody>
@@ -41637,7 +41637,7 @@
                 <a:ea typeface="Malgun Gothic"/>
                 <a:cs typeface="Malgun Gothic"/>
               </a:rPr>
-              <a:t>© HANWHA SYSTEMS ICT · IT-SYS-003 · 사내 일반</a:t>
+              <a:t>© 가상 ICT 기업 · IT-SYS-003 · 사내 일반</a:t>
             </a:r>
           </a:p>
         </p:txBody>
